--- a/assets/ppts/M4.6_Transmission_Media.pptx
+++ b/assets/ppts/M4.6_Transmission_Media.pptx
@@ -8,6 +8,7 @@
     <p:sldId id="256" r:id="rId7"/>
     <p:sldId id="257" r:id="rId8"/>
     <p:sldId id="258" r:id="rId9"/>
+    <p:sldId id="259" r:id="rId10"/>
   </p:sldIdLst>
   <p:sldSz cx="12191695" cy="6858000" type="screen4x3"/>
   <p:notesSz cx="6858000" cy="9144000"/>
@@ -3141,8 +3142,8 @@
         </p:nvSpPr>
         <p:spPr>
           <a:xfrm>
-            <a:off x="822960" y="1188720"/>
-            <a:ext cx="164592" cy="4480560"/>
+            <a:off x="0" y="0"/>
+            <a:ext cx="12191695" cy="137160"/>
           </a:xfrm>
           <a:prstGeom prst="rect">
             <a:avLst/>
@@ -3178,14 +3179,57 @@
       </p:sp>
       <p:sp>
         <p:nvSpPr>
-          <p:cNvPr id="4" name="TextBox 3"/>
+          <p:cNvPr id="4" name="Rectangle 3"/>
+          <p:cNvSpPr/>
+          <p:nvPr/>
+        </p:nvSpPr>
+        <p:spPr>
+          <a:xfrm>
+            <a:off x="822960" y="1097280"/>
+            <a:ext cx="164592" cy="4663440"/>
+          </a:xfrm>
+          <a:prstGeom prst="rect">
+            <a:avLst/>
+          </a:prstGeom>
+          <a:solidFill>
+            <a:srgbClr val="D97706"/>
+          </a:solidFill>
+          <a:ln>
+            <a:noFill/>
+          </a:ln>
+        </p:spPr>
+        <p:style>
+          <a:lnRef idx="1">
+            <a:schemeClr val="accent1"/>
+          </a:lnRef>
+          <a:fillRef idx="3">
+            <a:schemeClr val="accent1"/>
+          </a:fillRef>
+          <a:effectRef idx="2">
+            <a:schemeClr val="accent1"/>
+          </a:effectRef>
+          <a:fontRef idx="minor">
+            <a:schemeClr val="lt1"/>
+          </a:fontRef>
+        </p:style>
+        <p:txBody>
+          <a:bodyPr rtlCol="0" anchor="ctr"/>
+          <a:lstStyle/>
+          <a:p>
+            <a:pPr algn="ctr"/>
+          </a:p>
+        </p:txBody>
+      </p:sp>
+      <p:sp>
+        <p:nvSpPr>
+          <p:cNvPr id="5" name="TextBox 4"/>
           <p:cNvSpPr txBox="1"/>
           <p:nvPr/>
         </p:nvSpPr>
         <p:spPr>
           <a:xfrm>
-            <a:off x="1280160" y="1097280"/>
-            <a:ext cx="10058400" cy="4663440"/>
+            <a:off x="1234440" y="1005840"/>
+            <a:ext cx="10241280" cy="4846320"/>
           </a:xfrm>
           <a:prstGeom prst="rect">
             <a:avLst/>
@@ -3200,70 +3244,165 @@
           <a:p>
             <a:pPr>
               <a:spcAft>
+                <a:spcPts val="1000"/>
+              </a:spcAft>
+              <a:defRPr b="1" sz="1300">
+                <a:solidFill>
+                  <a:srgbClr val="D97706"/>
+                </a:solidFill>
+              </a:defRPr>
+            </a:pPr>
+            <a:r>
+              <a:t>PCCST501 Computer Networks | KTU 2024 Scheme • MODULE 4 • M4.6</a:t>
+            </a:r>
+          </a:p>
+          <a:p>
+            <a:pPr>
+              <a:spcAft>
                 <a:spcPts val="1200"/>
               </a:spcAft>
-              <a:defRPr b="1" sz="1300">
-                <a:solidFill>
-                  <a:srgbClr val="D97706"/>
+              <a:defRPr b="1" sz="3000">
+                <a:solidFill>
+                  <a:srgbClr val="F8FAFC"/>
                 </a:solidFill>
               </a:defRPr>
             </a:pPr>
             <a:r>
-              <a:t>PCCST501 Computer Networks | KTU 2024 Scheme • MODULE 4 • M4.6</a:t>
+              <a:t>Physical Transmission Media</a:t>
             </a:r>
           </a:p>
           <a:p>
             <a:pPr>
               <a:spcAft>
-                <a:spcPts val="1400"/>
+                <a:spcPts val="2400"/>
               </a:spcAft>
-              <a:defRPr b="1" sz="3200">
-                <a:solidFill>
-                  <a:srgbClr val="F8FAFC"/>
+              <a:defRPr sz="1600">
+                <a:solidFill>
+                  <a:srgbClr val="94A3B8"/>
                 </a:solidFill>
               </a:defRPr>
             </a:pPr>
             <a:r>
-              <a:t>Transmission Media (Guided &amp; Unguided)</a:t>
+              <a:t>Guided Media (Twisted Pair UTP/STP, Coaxial Cable, Fiber Optics SMF/MMF), Unguided Wireless (Radio Waves, Microwaves, Infrared)</a:t>
             </a:r>
           </a:p>
           <a:p>
             <a:pPr>
               <a:spcAft>
-                <a:spcPts val="2800"/>
+                <a:spcPts val="300"/>
               </a:spcAft>
-              <a:defRPr sz="1700">
+              <a:defRPr b="1" sz="1350">
+                <a:solidFill>
+                  <a:srgbClr val="E2E8F0"/>
+                </a:solidFill>
+              </a:defRPr>
+            </a:pPr>
+            <a:r>
+              <a:t>Prepared by: Prof. Anju Markose | Assistant Professor, Dept. of CSE | VJCET</a:t>
+            </a:r>
+          </a:p>
+          <a:p>
+            <a:pPr>
+              <a:defRPr sz="1150">
                 <a:solidFill>
                   <a:srgbClr val="94A3B8"/>
                 </a:solidFill>
               </a:defRPr>
             </a:pPr>
             <a:r>
-              <a:t>Guided Media (Twisted Pair UTP/STP, Coaxial, Optical Fiber Single/Multi-mode TIR), Unguided Wireless &amp; Satellite Orbits</a:t>
-            </a:r>
-          </a:p>
+              <a:t>Viswajyothi College of Engineering and Technology (VJCET), Vazhakulam • KTU S5 CSE</a:t>
+            </a:r>
+          </a:p>
+        </p:txBody>
+      </p:sp>
+      <p:sp>
+        <p:nvSpPr>
+          <p:cNvPr id="6" name="Rounded Rectangle 5"/>
+          <p:cNvSpPr/>
+          <p:nvPr/>
+        </p:nvSpPr>
+        <p:spPr>
+          <a:xfrm>
+            <a:off x="8412480" y="5120640"/>
+            <a:ext cx="3017520" cy="822960"/>
+          </a:xfrm>
+          <a:prstGeom prst="roundRect">
+            <a:avLst/>
+          </a:prstGeom>
+          <a:solidFill>
+            <a:srgbClr val="1E293B"/>
+          </a:solidFill>
+          <a:ln w="12700">
+            <a:solidFill>
+              <a:srgbClr val="0E7490"/>
+            </a:solidFill>
+          </a:ln>
+        </p:spPr>
+        <p:style>
+          <a:lnRef idx="1">
+            <a:schemeClr val="accent1"/>
+          </a:lnRef>
+          <a:fillRef idx="3">
+            <a:schemeClr val="accent1"/>
+          </a:fillRef>
+          <a:effectRef idx="2">
+            <a:schemeClr val="accent1"/>
+          </a:effectRef>
+          <a:fontRef idx="minor">
+            <a:schemeClr val="lt1"/>
+          </a:fontRef>
+        </p:style>
+        <p:txBody>
+          <a:bodyPr rtlCol="0" anchor="ctr"/>
+          <a:lstStyle/>
+          <a:p>
+            <a:pPr algn="ctr"/>
+          </a:p>
+        </p:txBody>
+      </p:sp>
+      <p:sp>
+        <p:nvSpPr>
+          <p:cNvPr id="7" name="TextBox 6"/>
+          <p:cNvSpPr txBox="1"/>
+          <p:nvPr/>
+        </p:nvSpPr>
+        <p:spPr>
+          <a:xfrm>
+            <a:off x="8503920" y="5166360"/>
+            <a:ext cx="2834640" cy="731520"/>
+          </a:xfrm>
+          <a:prstGeom prst="rect">
+            <a:avLst/>
+          </a:prstGeom>
+          <a:noFill/>
+        </p:spPr>
+        <p:txBody>
+          <a:bodyPr wrap="none">
+            <a:spAutoFit/>
+          </a:bodyPr>
+          <a:lstStyle/>
           <a:p>
             <a:pPr>
-              <a:defRPr b="1" sz="1300">
-                <a:solidFill>
-                  <a:srgbClr val="E2E8F0"/>
+              <a:defRPr b="1" sz="1050">
+                <a:solidFill>
+                  <a:srgbClr val="D97706"/>
                 </a:solidFill>
               </a:defRPr>
             </a:pPr>
             <a:r>
-              <a:t>Prepared by: Prof. Anju Markose | Assistant Professor, Dept. of CSE | VJCET</a:t>
+              <a:t>KTU B.Tech Curriculum</a:t>
             </a:r>
           </a:p>
           <a:p>
             <a:pPr>
-              <a:defRPr sz="1100">
-                <a:solidFill>
-                  <a:srgbClr val="94A3B8"/>
+              <a:defRPr sz="950">
+                <a:solidFill>
+                  <a:srgbClr val="F8FAFC"/>
                 </a:solidFill>
               </a:defRPr>
             </a:pPr>
             <a:r>
-              <a:t>Viswajyothi College of Engineering and Technology (VJCET), Vazhakulam</a:t>
+              <a:t>Official Classroom Slide Deck</a:t>
             </a:r>
           </a:p>
         </p:txBody>
@@ -3395,14 +3534,14 @@
           <a:lstStyle/>
           <a:p>
             <a:pPr>
-              <a:defRPr b="1" sz="2300">
+              <a:defRPr b="1" sz="2200">
                 <a:solidFill>
                   <a:srgbClr val="F8FAFC"/>
                 </a:solidFill>
               </a:defRPr>
             </a:pPr>
             <a:r>
-              <a:t>4.6.1 Guided Transmission Media: Copper vs Optical Fiber</a:t>
+              <a:t>4.6.1 Guided Media: Twisted Pair vs Coaxial vs Optical Fiber</a:t>
             </a:r>
           </a:p>
         </p:txBody>
@@ -3450,18 +3589,18 @@
         </p:nvSpPr>
         <p:spPr>
           <a:xfrm>
-            <a:off x="731520" y="1280160"/>
-            <a:ext cx="5212080" cy="4846320"/>
+            <a:off x="731520" y="1234440"/>
+            <a:ext cx="5212080" cy="4892040"/>
           </a:xfrm>
           <a:prstGeom prst="roundRect">
             <a:avLst/>
           </a:prstGeom>
           <a:solidFill>
-            <a:srgbClr val="F1F5F9"/>
+            <a:srgbClr val="F8FAFC"/>
           </a:solidFill>
           <a:ln w="19050">
             <a:solidFill>
-              <a:srgbClr val="0E7490"/>
+              <a:srgbClr val="0F1E4A"/>
             </a:solidFill>
           </a:ln>
         </p:spPr>
@@ -3495,7 +3634,7 @@
         </p:nvSpPr>
         <p:spPr>
           <a:xfrm>
-            <a:off x="914400" y="1417320"/>
+            <a:off x="914400" y="1371600"/>
             <a:ext cx="4846320" cy="4572000"/>
           </a:xfrm>
           <a:prstGeom prst="rect">
@@ -3511,61 +3650,46 @@
           <a:p>
             <a:pPr>
               <a:spcAft>
-                <a:spcPts val="1200"/>
+                <a:spcPts val="1000"/>
               </a:spcAft>
-              <a:defRPr b="1" sz="1600">
+              <a:defRPr b="1" sz="1550">
                 <a:solidFill>
                   <a:srgbClr val="0F1E4A"/>
                 </a:solidFill>
               </a:defRPr>
             </a:pPr>
             <a:r>
-              <a:t>Twisted Pair &amp; Coaxial Cable (Copper)</a:t>
+              <a:t>Twisted-Pair &amp; Coaxial Cable</a:t>
             </a:r>
           </a:p>
           <a:p>
             <a:pPr>
               <a:spcAft>
-                <a:spcPts val="600"/>
+                <a:spcPts val="500"/>
               </a:spcAft>
-              <a:defRPr sz="1250">
-                <a:solidFill>
-                  <a:srgbClr val="1E293B"/>
+              <a:defRPr sz="1200">
+                <a:solidFill>
+                  <a:srgbClr val="0F172A"/>
                 </a:solidFill>
               </a:defRPr>
             </a:pPr>
             <a:r>
-              <a:t>• Unshielded Twisted Pair (UTP): Pairs twisted to cancel electromagnetic interference (EMI) and crosstalk. Cat 5e (1 Gbps / 100m), Cat 6/6A (10 Gbps / 55-100m). RJ-45 connector</a:t>
+              <a:t>• Twisted-Pair (UTP / STP): Two insulated copper wires twisted together to cancel electromagnetic interference (crosstalk). Cat 5e (100 MHz, 1 Gbps), Cat 6 (250 MHz, 10 Gbps up to 55m), Cat 6a (500 MHz, 10 Gbps 100m). Terminated with RJ-45 connectors</a:t>
             </a:r>
           </a:p>
           <a:p>
             <a:pPr>
               <a:spcAft>
-                <a:spcPts val="600"/>
+                <a:spcPts val="500"/>
               </a:spcAft>
-              <a:defRPr sz="1250">
-                <a:solidFill>
-                  <a:srgbClr val="1E293B"/>
+              <a:defRPr sz="1200">
+                <a:solidFill>
+                  <a:srgbClr val="0F172A"/>
                 </a:solidFill>
               </a:defRPr>
             </a:pPr>
             <a:r>
-              <a:t>• Shielded Twisted Pair (STP): Metal foil braid per pair for harsh industrial environments</a:t>
-            </a:r>
-          </a:p>
-          <a:p>
-            <a:pPr>
-              <a:spcAft>
-                <a:spcPts val="600"/>
-              </a:spcAft>
-              <a:defRPr sz="1250">
-                <a:solidFill>
-                  <a:srgbClr val="1E293B"/>
-                </a:solidFill>
-              </a:defRPr>
-            </a:pPr>
-            <a:r>
-              <a:t>• Coaxial Cable: Central copper conductor surrounded by dielectric insulation, metallic braided shield, and jacket. 50$\Omega$ Baseband / 75$\Omega$ Broadband Cable TV</a:t>
+              <a:t>• Coaxial Cable: Central copper core surrounded by dielectric insulator, metallic braided shield, and outer jacket. 10Base5 (Thicknet, 500m), 10Base2 (Thinnet, 185m), RG-59 (Cable TV). Terminated with BNC connectors</a:t>
             </a:r>
           </a:p>
         </p:txBody>
@@ -3578,8 +3702,8 @@
         </p:nvSpPr>
         <p:spPr>
           <a:xfrm>
-            <a:off x="6309360" y="1280160"/>
-            <a:ext cx="5212080" cy="4846320"/>
+            <a:off x="6309360" y="1234440"/>
+            <a:ext cx="5212080" cy="4892040"/>
           </a:xfrm>
           <a:prstGeom prst="roundRect">
             <a:avLst/>
@@ -3589,7 +3713,7 @@
           </a:solidFill>
           <a:ln w="19050">
             <a:solidFill>
-              <a:srgbClr val="0F1E4A"/>
+              <a:srgbClr val="0E7490"/>
             </a:solidFill>
           </a:ln>
         </p:spPr>
@@ -3623,7 +3747,7 @@
         </p:nvSpPr>
         <p:spPr>
           <a:xfrm>
-            <a:off x="6492240" y="1417320"/>
+            <a:off x="6492240" y="1371600"/>
             <a:ext cx="4846320" cy="4572000"/>
           </a:xfrm>
           <a:prstGeom prst="rect">
@@ -3639,91 +3763,76 @@
           <a:p>
             <a:pPr>
               <a:spcAft>
-                <a:spcPts val="1200"/>
+                <a:spcPts val="1000"/>
               </a:spcAft>
-              <a:defRPr b="1" sz="1600">
+              <a:defRPr b="1" sz="1550">
                 <a:solidFill>
                   <a:srgbClr val="0E7490"/>
                 </a:solidFill>
               </a:defRPr>
             </a:pPr>
             <a:r>
-              <a:t>Optical Fiber (Glass / Silica Core)</a:t>
+              <a:t>Optical Fiber (Total Internal Reflection)</a:t>
             </a:r>
           </a:p>
           <a:p>
             <a:pPr>
               <a:spcAft>
-                <a:spcPts val="600"/>
+                <a:spcPts val="500"/>
               </a:spcAft>
-              <a:defRPr sz="1250">
-                <a:solidFill>
-                  <a:srgbClr val="1E293B"/>
+              <a:defRPr sz="1200">
+                <a:solidFill>
+                  <a:srgbClr val="0F172A"/>
                 </a:solidFill>
               </a:defRPr>
             </a:pPr>
             <a:r>
-              <a:t>• Propagation Principle: Total Internal Reflection (TIR) when light angle exceeds critical angle (Core refractive index $n_1 &gt;$ Cladding $n_2$)</a:t>
+              <a:t>• Physics Principle: Light pulses propagate via Total Internal Reflection inside glass core (refractive index $n_1$) surrounded by cladding ($n_2 &lt; n_1$) when incident angle exceeds critical angle</a:t>
             </a:r>
           </a:p>
           <a:p>
             <a:pPr>
               <a:spcAft>
-                <a:spcPts val="600"/>
+                <a:spcPts val="500"/>
               </a:spcAft>
-              <a:defRPr sz="1250">
-                <a:solidFill>
-                  <a:srgbClr val="1E293B"/>
+              <a:defRPr sz="1200">
+                <a:solidFill>
+                  <a:srgbClr val="0F172A"/>
                 </a:solidFill>
               </a:defRPr>
             </a:pPr>
             <a:r>
-              <a:t>• Step-Index vs Graded-Index: Step-Index: Constant core index. Graded-Index: Parabolic index profile reduces modal dispersion</a:t>
+              <a:t>• Multimode Step-Index: Multiple light rays reflect abruptly at core-cladding boundary; causes modal dispersion (short distances)</a:t>
             </a:r>
           </a:p>
           <a:p>
             <a:pPr>
               <a:spcAft>
-                <a:spcPts val="600"/>
+                <a:spcPts val="500"/>
               </a:spcAft>
-              <a:defRPr sz="1250">
-                <a:solidFill>
-                  <a:srgbClr val="1E293B"/>
+              <a:defRPr sz="1200">
+                <a:solidFill>
+                  <a:srgbClr val="0F172A"/>
                 </a:solidFill>
               </a:defRPr>
             </a:pPr>
             <a:r>
-              <a:t>• Single-Mode Fiber (SMF): Tiny core (8-10 $\mu$m); zero modal dispersion; laser source; reach &gt; 40 km</a:t>
+              <a:t>• Multimode Graded-Index: Core refractive index decreases gradually outward; light rays curve smoothly, reducing modal dispersion</a:t>
             </a:r>
           </a:p>
           <a:p>
             <a:pPr>
               <a:spcAft>
-                <a:spcPts val="600"/>
+                <a:spcPts val="500"/>
               </a:spcAft>
-              <a:defRPr sz="1250">
-                <a:solidFill>
-                  <a:srgbClr val="1E293B"/>
+              <a:defRPr sz="1200">
+                <a:solidFill>
+                  <a:srgbClr val="0F172A"/>
                 </a:solidFill>
               </a:defRPr>
             </a:pPr>
             <a:r>
-              <a:t>• Multi-Mode Fiber (MMF): Larger core (50-62.5 $\mu$m); LED source; short reach (&lt; 2 km) inside LANs/data centers</a:t>
-            </a:r>
-          </a:p>
-          <a:p>
-            <a:pPr>
-              <a:spcAft>
-                <a:spcPts val="600"/>
-              </a:spcAft>
-              <a:defRPr sz="1250">
-                <a:solidFill>
-                  <a:srgbClr val="1E293B"/>
-                </a:solidFill>
-              </a:defRPr>
-            </a:pPr>
-            <a:r>
-              <a:t>• Immense Advantages: Immense bandwidth, zero electromagnetic interference (EMI), complete electrical isolation, low attenuation</a:t>
+              <a:t>• Single-Mode Fiber (SMF): Ultra-narrow core (8-10 $\mu$m); single light ray propagates straight; zero modal dispersion; enables 100+ km long-haul backbone links</a:t>
             </a:r>
           </a:p>
         </p:txBody>
@@ -3736,8 +3845,8 @@
         </p:nvSpPr>
         <p:spPr>
           <a:xfrm>
-            <a:off x="731520" y="6309360"/>
-            <a:ext cx="10789920" cy="365760"/>
+            <a:off x="731520" y="6327648"/>
+            <a:ext cx="10789920" cy="320040"/>
           </a:xfrm>
           <a:prstGeom prst="rect">
             <a:avLst/>
@@ -3759,6 +3868,41 @@
             </a:pPr>
             <a:r>
               <a:t>PCCST501 Computer Networks | KTU 2024 Scheme | Prof. Anju Markose | Assistant Professor, Dept. of CSE | VJCET</a:t>
+            </a:r>
+          </a:p>
+        </p:txBody>
+      </p:sp>
+      <p:sp>
+        <p:nvSpPr>
+          <p:cNvPr id="11" name="TextBox 10"/>
+          <p:cNvSpPr txBox="1"/>
+          <p:nvPr/>
+        </p:nvSpPr>
+        <p:spPr>
+          <a:xfrm>
+            <a:off x="6858000" y="6327648"/>
+            <a:ext cx="4572000" cy="320040"/>
+          </a:xfrm>
+          <a:prstGeom prst="rect">
+            <a:avLst/>
+          </a:prstGeom>
+          <a:noFill/>
+        </p:spPr>
+        <p:txBody>
+          <a:bodyPr wrap="none">
+            <a:spAutoFit/>
+          </a:bodyPr>
+          <a:lstStyle/>
+          <a:p>
+            <a:pPr algn="r">
+              <a:defRPr sz="950">
+                <a:solidFill>
+                  <a:srgbClr val="64748B"/>
+                </a:solidFill>
+              </a:defRPr>
+            </a:pPr>
+            <a:r>
+              <a:t>Dept. of CSE, VJCET</a:t>
             </a:r>
           </a:p>
         </p:txBody>
@@ -3890,14 +4034,14 @@
           <a:lstStyle/>
           <a:p>
             <a:pPr>
-              <a:defRPr b="1" sz="2300">
+              <a:defRPr b="1" sz="2200">
                 <a:solidFill>
                   <a:srgbClr val="F8FAFC"/>
                 </a:solidFill>
               </a:defRPr>
             </a:pPr>
             <a:r>
-              <a:t>4.6.2 Unguided Media (Wireless) &amp; Satellite Orbits</a:t>
+              <a:t>4.6.2 Unguided Media: Wireless Electromagnetic Spectrum</a:t>
             </a:r>
           </a:p>
         </p:txBody>
@@ -3932,7 +4076,7 @@
               </a:defRPr>
             </a:pPr>
             <a:r>
-              <a:t>M4.6 UNGUIDED &amp; SATELLITES</a:t>
+              <a:t>M4.6 UNGUIDED WIRELESS</a:t>
             </a:r>
           </a:p>
         </p:txBody>
@@ -3945,7 +4089,7 @@
         </p:nvSpPr>
         <p:spPr>
           <a:xfrm>
-            <a:off x="731520" y="1280160"/>
+            <a:off x="731520" y="1234440"/>
             <a:ext cx="6858000" cy="4937760"/>
           </a:xfrm>
           <a:prstGeom prst="rect">
@@ -3963,7 +4107,7 @@
               <a:spcAft>
                 <a:spcPts val="200"/>
               </a:spcAft>
-              <a:defRPr b="1" sz="1500">
+              <a:defRPr b="1" sz="1450">
                 <a:solidFill>
                   <a:srgbClr val="0F1E4A"/>
                 </a:solidFill>
@@ -3976,16 +4120,16 @@
           <a:p>
             <a:pPr>
               <a:spcAft>
-                <a:spcPts val="800"/>
+                <a:spcPts val="700"/>
               </a:spcAft>
-              <a:defRPr sz="1300">
-                <a:solidFill>
-                  <a:srgbClr val="1E293B"/>
+              <a:defRPr sz="1250">
+                <a:solidFill>
+                  <a:srgbClr val="0F172A"/>
                 </a:solidFill>
               </a:defRPr>
             </a:pPr>
             <a:r>
-              <a:t>   Omnidirectional propagation (signals travel in all directions). Penetrates building walls easily. Used for AM/FM radio, cordless phones, and VHF television.</a:t>
+              <a:t>   Omnidirectional radiation pattern (transmitting antenna broadcasts signals in all directions). Penetrates physical walls effortlessly. Subject to multi-path interference. Used in AM/FM radio and cordless phones.</a:t>
             </a:r>
           </a:p>
           <a:p>
@@ -3993,7 +4137,7 @@
               <a:spcAft>
                 <a:spcPts val="200"/>
               </a:spcAft>
-              <a:defRPr b="1" sz="1500">
+              <a:defRPr b="1" sz="1450">
                 <a:solidFill>
                   <a:srgbClr val="0F1E4A"/>
                 </a:solidFill>
@@ -4006,16 +4150,16 @@
           <a:p>
             <a:pPr>
               <a:spcAft>
-                <a:spcPts val="800"/>
+                <a:spcPts val="700"/>
               </a:spcAft>
-              <a:defRPr sz="1300">
-                <a:solidFill>
-                  <a:srgbClr val="1E293B"/>
+              <a:defRPr sz="1250">
+                <a:solidFill>
+                  <a:srgbClr val="0F172A"/>
                 </a:solidFill>
               </a:defRPr>
             </a:pPr>
             <a:r>
-              <a:t>   Directional line-of-sight propagation using parabolic dish antennas. Cannot penetrate walls effectively; subject to rain attenuation (Used for terrestrial towers, radar, satellite).</a:t>
+              <a:t>   Unidirectional, Line-of-Sight propagation. Focused beam using parabolic dish or horn antennas. Cannot penetrate solid obstacles (walls, hills). Used in cellular networks, satellite communications, and GPS.</a:t>
             </a:r>
           </a:p>
           <a:p>
@@ -4023,119 +4167,29 @@
               <a:spcAft>
                 <a:spcPts val="200"/>
               </a:spcAft>
-              <a:defRPr b="1" sz="1500">
+              <a:defRPr b="1" sz="1450">
                 <a:solidFill>
                   <a:srgbClr val="0F1E4A"/>
                 </a:solidFill>
               </a:defRPr>
             </a:pPr>
             <a:r>
-              <a:t>• Infrared (300 GHz to 400 THz)</a:t>
+              <a:t>• Infrared Waves (300 GHz to 400 THz)</a:t>
             </a:r>
           </a:p>
           <a:p>
             <a:pPr>
               <a:spcAft>
-                <a:spcPts val="800"/>
+                <a:spcPts val="700"/>
               </a:spcAft>
-              <a:defRPr sz="1300">
-                <a:solidFill>
-                  <a:srgbClr val="1E293B"/>
+              <a:defRPr sz="1250">
+                <a:solidFill>
+                  <a:srgbClr val="0F172A"/>
                 </a:solidFill>
               </a:defRPr>
             </a:pPr>
             <a:r>
-              <a:t>   High-frequency line-of-sight; cannot penetrate solid walls (prevents eavesdropping). Used for short-range TV remotes and wireless peripherals.</a:t>
-            </a:r>
-          </a:p>
-          <a:p>
-            <a:pPr>
-              <a:spcAft>
-                <a:spcPts val="200"/>
-              </a:spcAft>
-              <a:defRPr b="1" sz="1500">
-                <a:solidFill>
-                  <a:srgbClr val="0F1E4A"/>
-                </a:solidFill>
-              </a:defRPr>
-            </a:pPr>
-            <a:r>
-              <a:t>• Geostationary Earth Orbit (GEO ~35,786 km)</a:t>
-            </a:r>
-          </a:p>
-          <a:p>
-            <a:pPr>
-              <a:spcAft>
-                <a:spcPts val="800"/>
-              </a:spcAft>
-              <a:defRPr sz="1300">
-                <a:solidFill>
-                  <a:srgbClr val="1E293B"/>
-                </a:solidFill>
-              </a:defRPr>
-            </a:pPr>
-            <a:r>
-              <a:t>   Orbital period matches Earth's rotation (24 hrs); fixed position above equator. High propagation delay (~250 ms one-way RTT $\approx 500$ ms).</a:t>
-            </a:r>
-          </a:p>
-          <a:p>
-            <a:pPr>
-              <a:spcAft>
-                <a:spcPts val="200"/>
-              </a:spcAft>
-              <a:defRPr b="1" sz="1500">
-                <a:solidFill>
-                  <a:srgbClr val="0F1E4A"/>
-                </a:solidFill>
-              </a:defRPr>
-            </a:pPr>
-            <a:r>
-              <a:t>• Medium Earth Orbit (MEO ~2,000 to 20,000 km)</a:t>
-            </a:r>
-          </a:p>
-          <a:p>
-            <a:pPr>
-              <a:spcAft>
-                <a:spcPts val="800"/>
-              </a:spcAft>
-              <a:defRPr sz="1300">
-                <a:solidFill>
-                  <a:srgbClr val="1E293B"/>
-                </a:solidFill>
-              </a:defRPr>
-            </a:pPr>
-            <a:r>
-              <a:t>   Used by GPS constellations (24 satellites at ~20,200 km).</a:t>
-            </a:r>
-          </a:p>
-          <a:p>
-            <a:pPr>
-              <a:spcAft>
-                <a:spcPts val="200"/>
-              </a:spcAft>
-              <a:defRPr b="1" sz="1500">
-                <a:solidFill>
-                  <a:srgbClr val="0F1E4A"/>
-                </a:solidFill>
-              </a:defRPr>
-            </a:pPr>
-            <a:r>
-              <a:t>• Low Earth Orbit (LEO ~500 to 1,500 km)</a:t>
-            </a:r>
-          </a:p>
-          <a:p>
-            <a:pPr>
-              <a:spcAft>
-                <a:spcPts val="800"/>
-              </a:spcAft>
-              <a:defRPr sz="1300">
-                <a:solidFill>
-                  <a:srgbClr val="1E293B"/>
-                </a:solidFill>
-              </a:defRPr>
-            </a:pPr>
-            <a:r>
-              <a:t>   Low propagation delay (~20-40 ms RTT); requires mega-constellations of thousands of satellites (e.g. Starlink, OneWeb).</a:t>
+              <a:t>   High-frequency, short-range line-of-sight communication. Completely blocked by walls and solid obstacles (ensures indoor security without room-to-room interference). Used in TV remote controls and IrDA devices.</a:t>
             </a:r>
           </a:p>
         </p:txBody>
@@ -4148,14 +4202,14 @@
         </p:nvSpPr>
         <p:spPr>
           <a:xfrm>
-            <a:off x="7955279" y="1280160"/>
-            <a:ext cx="3566160" cy="4846320"/>
+            <a:off x="7955279" y="1234440"/>
+            <a:ext cx="3566160" cy="4892040"/>
           </a:xfrm>
           <a:prstGeom prst="roundRect">
             <a:avLst/>
           </a:prstGeom>
           <a:solidFill>
-            <a:srgbClr val="F1F5F9"/>
+            <a:srgbClr val="F8FAFC"/>
           </a:solidFill>
           <a:ln w="19050">
             <a:solidFill>
@@ -4193,7 +4247,7 @@
         </p:nvSpPr>
         <p:spPr>
           <a:xfrm>
-            <a:off x="8138160" y="1417320"/>
+            <a:off x="8138160" y="1371600"/>
             <a:ext cx="3200400" cy="4572000"/>
           </a:xfrm>
           <a:prstGeom prst="rect">
@@ -4218,7 +4272,7 @@
               </a:defRPr>
             </a:pPr>
             <a:r>
-              <a:t>Satellite Orbits</a:t>
+              <a:t>Wireless Spectrum</a:t>
             </a:r>
           </a:p>
           <a:p>
@@ -4228,12 +4282,12 @@
               </a:spcAft>
               <a:defRPr sz="1200">
                 <a:solidFill>
-                  <a:srgbClr val="1E293B"/>
+                  <a:srgbClr val="0F172A"/>
                 </a:solidFill>
               </a:defRPr>
             </a:pPr>
             <a:r>
-              <a:t>→ GEO: 35,786 km (High delay ~500ms)</a:t>
+              <a:t>→ Radio: Omnidirectional (Wall penetration)</a:t>
             </a:r>
           </a:p>
           <a:p>
@@ -4243,12 +4297,12 @@
               </a:spcAft>
               <a:defRPr sz="1200">
                 <a:solidFill>
-                  <a:srgbClr val="1E293B"/>
+                  <a:srgbClr val="0F172A"/>
                 </a:solidFill>
               </a:defRPr>
             </a:pPr>
             <a:r>
-              <a:t>→ MEO: 20,200 km (GPS navigation)</a:t>
+              <a:t>→ Microwaves: Line-of-sight (Dish antenna)</a:t>
             </a:r>
           </a:p>
           <a:p>
@@ -4258,12 +4312,12 @@
               </a:spcAft>
               <a:defRPr sz="1200">
                 <a:solidFill>
-                  <a:srgbClr val="1E293B"/>
+                  <a:srgbClr val="0F172A"/>
                 </a:solidFill>
               </a:defRPr>
             </a:pPr>
             <a:r>
-              <a:t>→ LEO: 500-1500 km (Low latency broadband)</a:t>
+              <a:t>→ Infrared: Short range (Blocked by walls)</a:t>
             </a:r>
           </a:p>
           <a:p>
@@ -4273,12 +4327,27 @@
               </a:spcAft>
               <a:defRPr sz="1200">
                 <a:solidFill>
-                  <a:srgbClr val="1E293B"/>
+                  <a:srgbClr val="0F172A"/>
                 </a:solidFill>
               </a:defRPr>
             </a:pPr>
             <a:r>
-              <a:t>→ All KTU CO5 Topics Covered</a:t>
+              <a:t>→ Satellite: Geosynchronous (36,000 km)</a:t>
+            </a:r>
+          </a:p>
+          <a:p>
+            <a:pPr>
+              <a:spcAft>
+                <a:spcPts val="600"/>
+              </a:spcAft>
+              <a:defRPr sz="1200">
+                <a:solidFill>
+                  <a:srgbClr val="0F172A"/>
+                </a:solidFill>
+              </a:defRPr>
+            </a:pPr>
+            <a:r>
+              <a:t>→ Fiber: Total Internal Reflection</a:t>
             </a:r>
           </a:p>
         </p:txBody>
@@ -4291,8 +4360,8 @@
         </p:nvSpPr>
         <p:spPr>
           <a:xfrm>
-            <a:off x="731520" y="6309360"/>
-            <a:ext cx="10789920" cy="365760"/>
+            <a:off x="731520" y="6327648"/>
+            <a:ext cx="10789920" cy="320040"/>
           </a:xfrm>
           <a:prstGeom prst="rect">
             <a:avLst/>
@@ -4314,6 +4383,541 @@
             </a:pPr>
             <a:r>
               <a:t>PCCST501 Computer Networks | KTU 2024 Scheme | Prof. Anju Markose | Assistant Professor, Dept. of CSE | VJCET</a:t>
+            </a:r>
+          </a:p>
+        </p:txBody>
+      </p:sp>
+      <p:sp>
+        <p:nvSpPr>
+          <p:cNvPr id="10" name="TextBox 9"/>
+          <p:cNvSpPr txBox="1"/>
+          <p:nvPr/>
+        </p:nvSpPr>
+        <p:spPr>
+          <a:xfrm>
+            <a:off x="6858000" y="6327648"/>
+            <a:ext cx="4572000" cy="320040"/>
+          </a:xfrm>
+          <a:prstGeom prst="rect">
+            <a:avLst/>
+          </a:prstGeom>
+          <a:noFill/>
+        </p:spPr>
+        <p:txBody>
+          <a:bodyPr wrap="none">
+            <a:spAutoFit/>
+          </a:bodyPr>
+          <a:lstStyle/>
+          <a:p>
+            <a:pPr algn="r">
+              <a:defRPr sz="950">
+                <a:solidFill>
+                  <a:srgbClr val="64748B"/>
+                </a:solidFill>
+              </a:defRPr>
+            </a:pPr>
+            <a:r>
+              <a:t>Dept. of CSE, VJCET</a:t>
+            </a:r>
+          </a:p>
+        </p:txBody>
+      </p:sp>
+    </p:spTree>
+  </p:cSld>
+  <p:clrMapOvr>
+    <a:masterClrMapping/>
+  </p:clrMapOvr>
+</p:sld>
+</file>
+
+<file path=ppt/slides/slide4.xml><?xml version="1.0" encoding="utf-8"?>
+<p:sld xmlns:a="http://schemas.openxmlformats.org/drawingml/2006/main" xmlns:p="http://schemas.openxmlformats.org/presentationml/2006/main" xmlns:r="http://schemas.openxmlformats.org/officeDocument/2006/relationships">
+  <p:cSld>
+    <p:spTree>
+      <p:nvGrpSpPr>
+        <p:cNvPr id="1" name=""/>
+        <p:cNvGrpSpPr/>
+        <p:nvPr/>
+      </p:nvGrpSpPr>
+      <p:grpSpPr/>
+      <p:sp>
+        <p:nvSpPr>
+          <p:cNvPr id="2" name="Rectangle 1"/>
+          <p:cNvSpPr/>
+          <p:nvPr/>
+        </p:nvSpPr>
+        <p:spPr>
+          <a:xfrm>
+            <a:off x="0" y="0"/>
+            <a:ext cx="12191695" cy="1005840"/>
+          </a:xfrm>
+          <a:prstGeom prst="rect">
+            <a:avLst/>
+          </a:prstGeom>
+          <a:solidFill>
+            <a:srgbClr val="0F1E4A"/>
+          </a:solidFill>
+          <a:ln>
+            <a:noFill/>
+          </a:ln>
+        </p:spPr>
+        <p:style>
+          <a:lnRef idx="1">
+            <a:schemeClr val="accent1"/>
+          </a:lnRef>
+          <a:fillRef idx="3">
+            <a:schemeClr val="accent1"/>
+          </a:fillRef>
+          <a:effectRef idx="2">
+            <a:schemeClr val="accent1"/>
+          </a:effectRef>
+          <a:fontRef idx="minor">
+            <a:schemeClr val="lt1"/>
+          </a:fontRef>
+        </p:style>
+        <p:txBody>
+          <a:bodyPr rtlCol="0" anchor="ctr"/>
+          <a:lstStyle/>
+          <a:p>
+            <a:pPr algn="ctr"/>
+          </a:p>
+        </p:txBody>
+      </p:sp>
+      <p:sp>
+        <p:nvSpPr>
+          <p:cNvPr id="3" name="Rectangle 2"/>
+          <p:cNvSpPr/>
+          <p:nvPr/>
+        </p:nvSpPr>
+        <p:spPr>
+          <a:xfrm>
+            <a:off x="0" y="969264"/>
+            <a:ext cx="12191695" cy="36576"/>
+          </a:xfrm>
+          <a:prstGeom prst="rect">
+            <a:avLst/>
+          </a:prstGeom>
+          <a:solidFill>
+            <a:srgbClr val="D97706"/>
+          </a:solidFill>
+          <a:ln>
+            <a:noFill/>
+          </a:ln>
+        </p:spPr>
+        <p:style>
+          <a:lnRef idx="1">
+            <a:schemeClr val="accent1"/>
+          </a:lnRef>
+          <a:fillRef idx="3">
+            <a:schemeClr val="accent1"/>
+          </a:fillRef>
+          <a:effectRef idx="2">
+            <a:schemeClr val="accent1"/>
+          </a:effectRef>
+          <a:fontRef idx="minor">
+            <a:schemeClr val="lt1"/>
+          </a:fontRef>
+        </p:style>
+        <p:txBody>
+          <a:bodyPr rtlCol="0" anchor="ctr"/>
+          <a:lstStyle/>
+          <a:p>
+            <a:pPr algn="ctr"/>
+          </a:p>
+        </p:txBody>
+      </p:sp>
+      <p:sp>
+        <p:nvSpPr>
+          <p:cNvPr id="4" name="TextBox 3"/>
+          <p:cNvSpPr txBox="1"/>
+          <p:nvPr/>
+        </p:nvSpPr>
+        <p:spPr>
+          <a:xfrm>
+            <a:off x="731520" y="164592"/>
+            <a:ext cx="8412480" cy="685800"/>
+          </a:xfrm>
+          <a:prstGeom prst="rect">
+            <a:avLst/>
+          </a:prstGeom>
+          <a:noFill/>
+        </p:spPr>
+        <p:txBody>
+          <a:bodyPr wrap="none">
+            <a:spAutoFit/>
+          </a:bodyPr>
+          <a:lstStyle/>
+          <a:p>
+            <a:pPr>
+              <a:defRPr b="1" sz="2100">
+                <a:solidFill>
+                  <a:srgbClr val="F8FAFC"/>
+                </a:solidFill>
+              </a:defRPr>
+            </a:pPr>
+            <a:r>
+              <a:t>🎯 Exam Booster &amp; Review: Transmission Media</a:t>
+            </a:r>
+          </a:p>
+        </p:txBody>
+      </p:sp>
+      <p:sp>
+        <p:nvSpPr>
+          <p:cNvPr id="5" name="TextBox 4"/>
+          <p:cNvSpPr txBox="1"/>
+          <p:nvPr/>
+        </p:nvSpPr>
+        <p:spPr>
+          <a:xfrm>
+            <a:off x="8229600" y="164592"/>
+            <a:ext cx="3291840" cy="685800"/>
+          </a:xfrm>
+          <a:prstGeom prst="rect">
+            <a:avLst/>
+          </a:prstGeom>
+          <a:noFill/>
+        </p:spPr>
+        <p:txBody>
+          <a:bodyPr wrap="none">
+            <a:spAutoFit/>
+          </a:bodyPr>
+          <a:lstStyle/>
+          <a:p>
+            <a:pPr algn="r">
+              <a:defRPr b="1" sz="1300">
+                <a:solidFill>
+                  <a:srgbClr val="D97706"/>
+                </a:solidFill>
+              </a:defRPr>
+            </a:pPr>
+            <a:r>
+              <a:t>M4.6</a:t>
+            </a:r>
+          </a:p>
+        </p:txBody>
+      </p:sp>
+      <p:sp>
+        <p:nvSpPr>
+          <p:cNvPr id="6" name="Rounded Rectangle 5"/>
+          <p:cNvSpPr/>
+          <p:nvPr/>
+        </p:nvSpPr>
+        <p:spPr>
+          <a:xfrm>
+            <a:off x="731520" y="1234440"/>
+            <a:ext cx="5303520" cy="4892040"/>
+          </a:xfrm>
+          <a:prstGeom prst="roundRect">
+            <a:avLst/>
+          </a:prstGeom>
+          <a:solidFill>
+            <a:srgbClr val="FEF3C7"/>
+          </a:solidFill>
+          <a:ln w="19050">
+            <a:solidFill>
+              <a:srgbClr val="D97706"/>
+            </a:solidFill>
+          </a:ln>
+        </p:spPr>
+        <p:style>
+          <a:lnRef idx="1">
+            <a:schemeClr val="accent1"/>
+          </a:lnRef>
+          <a:fillRef idx="3">
+            <a:schemeClr val="accent1"/>
+          </a:fillRef>
+          <a:effectRef idx="2">
+            <a:schemeClr val="accent1"/>
+          </a:effectRef>
+          <a:fontRef idx="minor">
+            <a:schemeClr val="lt1"/>
+          </a:fontRef>
+        </p:style>
+        <p:txBody>
+          <a:bodyPr rtlCol="0" anchor="ctr"/>
+          <a:lstStyle/>
+          <a:p>
+            <a:pPr algn="ctr"/>
+          </a:p>
+        </p:txBody>
+      </p:sp>
+      <p:sp>
+        <p:nvSpPr>
+          <p:cNvPr id="7" name="TextBox 6"/>
+          <p:cNvSpPr txBox="1"/>
+          <p:nvPr/>
+        </p:nvSpPr>
+        <p:spPr>
+          <a:xfrm>
+            <a:off x="914400" y="1371600"/>
+            <a:ext cx="4937760" cy="4572000"/>
+          </a:xfrm>
+          <a:prstGeom prst="rect">
+            <a:avLst/>
+          </a:prstGeom>
+          <a:noFill/>
+        </p:spPr>
+        <p:txBody>
+          <a:bodyPr wrap="square">
+            <a:spAutoFit/>
+          </a:bodyPr>
+          <a:lstStyle/>
+          <a:p>
+            <a:pPr>
+              <a:spcAft>
+                <a:spcPts val="1000"/>
+              </a:spcAft>
+              <a:defRPr b="1" sz="1450">
+                <a:solidFill>
+                  <a:srgbClr val="D97706"/>
+                </a:solidFill>
+              </a:defRPr>
+            </a:pPr>
+            <a:r>
+              <a:t>📚 KTU High-Yield Questions (K2 Understand)</a:t>
+            </a:r>
+          </a:p>
+          <a:p>
+            <a:pPr>
+              <a:spcAft>
+                <a:spcPts val="700"/>
+              </a:spcAft>
+              <a:defRPr sz="1200">
+                <a:solidFill>
+                  <a:srgbClr val="0F172A"/>
+                </a:solidFill>
+              </a:defRPr>
+            </a:pPr>
+            <a:r>
+              <a:t>Q: Compare Step-Index Multimode, Graded-Index Multimode, and Single-Mode optical fibers with refractive index profiles and light propagation paths. (8 Marks)</a:t>
+            </a:r>
+          </a:p>
+          <a:p>
+            <a:pPr>
+              <a:spcAft>
+                <a:spcPts val="700"/>
+              </a:spcAft>
+              <a:defRPr sz="1200">
+                <a:solidFill>
+                  <a:srgbClr val="0F172A"/>
+                </a:solidFill>
+              </a:defRPr>
+            </a:pPr>
+            <a:r>
+              <a:t>Q: Compare Twisted-Pair Cable, Coaxial Cable, and Optical Fiber across bandwidth, attenuation, EMI immunity, and cost. (7 Marks)</a:t>
+            </a:r>
+          </a:p>
+          <a:p>
+            <a:pPr>
+              <a:spcAft>
+                <a:spcPts val="700"/>
+              </a:spcAft>
+              <a:defRPr sz="1200">
+                <a:solidFill>
+                  <a:srgbClr val="0F172A"/>
+                </a:solidFill>
+              </a:defRPr>
+            </a:pPr>
+            <a:r>
+              <a:t>Q: Differentiate between Radio waves, Microwaves, and Infrared wireless media. (6 Marks)</a:t>
+            </a:r>
+          </a:p>
+        </p:txBody>
+      </p:sp>
+      <p:sp>
+        <p:nvSpPr>
+          <p:cNvPr id="8" name="Rounded Rectangle 7"/>
+          <p:cNvSpPr/>
+          <p:nvPr/>
+        </p:nvSpPr>
+        <p:spPr>
+          <a:xfrm>
+            <a:off x="6309360" y="1234440"/>
+            <a:ext cx="5212080" cy="4892040"/>
+          </a:xfrm>
+          <a:prstGeom prst="roundRect">
+            <a:avLst/>
+          </a:prstGeom>
+          <a:solidFill>
+            <a:srgbClr val="EEF2FF"/>
+          </a:solidFill>
+          <a:ln w="19050">
+            <a:solidFill>
+              <a:srgbClr val="0E7490"/>
+            </a:solidFill>
+          </a:ln>
+        </p:spPr>
+        <p:style>
+          <a:lnRef idx="1">
+            <a:schemeClr val="accent1"/>
+          </a:lnRef>
+          <a:fillRef idx="3">
+            <a:schemeClr val="accent1"/>
+          </a:fillRef>
+          <a:effectRef idx="2">
+            <a:schemeClr val="accent1"/>
+          </a:effectRef>
+          <a:fontRef idx="minor">
+            <a:schemeClr val="lt1"/>
+          </a:fontRef>
+        </p:style>
+        <p:txBody>
+          <a:bodyPr rtlCol="0" anchor="ctr"/>
+          <a:lstStyle/>
+          <a:p>
+            <a:pPr algn="ctr"/>
+          </a:p>
+        </p:txBody>
+      </p:sp>
+      <p:sp>
+        <p:nvSpPr>
+          <p:cNvPr id="9" name="TextBox 8"/>
+          <p:cNvSpPr txBox="1"/>
+          <p:nvPr/>
+        </p:nvSpPr>
+        <p:spPr>
+          <a:xfrm>
+            <a:off x="6492240" y="1371600"/>
+            <a:ext cx="4846320" cy="4572000"/>
+          </a:xfrm>
+          <a:prstGeom prst="rect">
+            <a:avLst/>
+          </a:prstGeom>
+          <a:noFill/>
+        </p:spPr>
+        <p:txBody>
+          <a:bodyPr wrap="square">
+            <a:spAutoFit/>
+          </a:bodyPr>
+          <a:lstStyle/>
+          <a:p>
+            <a:pPr>
+              <a:spcAft>
+                <a:spcPts val="1000"/>
+              </a:spcAft>
+              <a:defRPr b="1" sz="1450">
+                <a:solidFill>
+                  <a:srgbClr val="0E7490"/>
+                </a:solidFill>
+              </a:defRPr>
+            </a:pPr>
+            <a:r>
+              <a:t>💡 Critical Conceptual Takeaways</a:t>
+            </a:r>
+          </a:p>
+          <a:p>
+            <a:pPr>
+              <a:spcAft>
+                <a:spcPts val="600"/>
+              </a:spcAft>
+              <a:defRPr sz="1200">
+                <a:solidFill>
+                  <a:srgbClr val="0F172A"/>
+                </a:solidFill>
+              </a:defRPr>
+            </a:pPr>
+            <a:r>
+              <a:t>✔ Optical fibers provide immense bandwidth, zero EMI susceptibility, and ultra-low attenuation.</a:t>
+            </a:r>
+          </a:p>
+          <a:p>
+            <a:pPr>
+              <a:spcAft>
+                <a:spcPts val="600"/>
+              </a:spcAft>
+              <a:defRPr sz="1200">
+                <a:solidFill>
+                  <a:srgbClr val="0F172A"/>
+                </a:solidFill>
+              </a:defRPr>
+            </a:pPr>
+            <a:r>
+              <a:t>✔ Single-mode fiber eliminates modal dispersion for high-speed long-distance backbones.</a:t>
+            </a:r>
+          </a:p>
+          <a:p>
+            <a:pPr>
+              <a:spcAft>
+                <a:spcPts val="600"/>
+              </a:spcAft>
+              <a:defRPr sz="1200">
+                <a:solidFill>
+                  <a:srgbClr val="0F172A"/>
+                </a:solidFill>
+              </a:defRPr>
+            </a:pPr>
+            <a:r>
+              <a:t>✔ Microwaves require line-of-sight parabolic antennas; Infrared is safely contained by room walls.</a:t>
+            </a:r>
+          </a:p>
+        </p:txBody>
+      </p:sp>
+      <p:sp>
+        <p:nvSpPr>
+          <p:cNvPr id="10" name="TextBox 9"/>
+          <p:cNvSpPr txBox="1"/>
+          <p:nvPr/>
+        </p:nvSpPr>
+        <p:spPr>
+          <a:xfrm>
+            <a:off x="731520" y="6327648"/>
+            <a:ext cx="10789920" cy="320040"/>
+          </a:xfrm>
+          <a:prstGeom prst="rect">
+            <a:avLst/>
+          </a:prstGeom>
+          <a:noFill/>
+        </p:spPr>
+        <p:txBody>
+          <a:bodyPr wrap="none">
+            <a:spAutoFit/>
+          </a:bodyPr>
+          <a:lstStyle/>
+          <a:p>
+            <a:pPr>
+              <a:defRPr sz="950">
+                <a:solidFill>
+                  <a:srgbClr val="64748B"/>
+                </a:solidFill>
+              </a:defRPr>
+            </a:pPr>
+            <a:r>
+              <a:t>PCCST501 Computer Networks | KTU 2024 Scheme | Prof. Anju Markose | Assistant Professor, Dept. of CSE | VJCET</a:t>
+            </a:r>
+          </a:p>
+        </p:txBody>
+      </p:sp>
+      <p:sp>
+        <p:nvSpPr>
+          <p:cNvPr id="11" name="TextBox 10"/>
+          <p:cNvSpPr txBox="1"/>
+          <p:nvPr/>
+        </p:nvSpPr>
+        <p:spPr>
+          <a:xfrm>
+            <a:off x="6858000" y="6327648"/>
+            <a:ext cx="4572000" cy="320040"/>
+          </a:xfrm>
+          <a:prstGeom prst="rect">
+            <a:avLst/>
+          </a:prstGeom>
+          <a:noFill/>
+        </p:spPr>
+        <p:txBody>
+          <a:bodyPr wrap="none">
+            <a:spAutoFit/>
+          </a:bodyPr>
+          <a:lstStyle/>
+          <a:p>
+            <a:pPr algn="r">
+              <a:defRPr sz="950">
+                <a:solidFill>
+                  <a:srgbClr val="64748B"/>
+                </a:solidFill>
+              </a:defRPr>
+            </a:pPr>
+            <a:r>
+              <a:t>Dept. of CSE, VJCET</a:t>
             </a:r>
           </a:p>
         </p:txBody>
